--- a/curso/pptx/S53.pptx
+++ b/curso/pptx/S53.pptx
@@ -3891,8 +3891,8 @@
         </p:nvSpPr>
         <p:spPr>
           <a:xfrm>
-            <a:off x="640000" y="420000"/>
-            <a:ext cx="10912000" cy="420000"/>
+            <a:off x="10652000" y="380000"/>
+            <a:ext cx="900000" cy="800000"/>
           </a:xfrm>
           <a:prstGeom prst="rect">
             <a:avLst/>
@@ -3907,17 +3907,17 @@
           <a:p>
             <a:pPr>
               <a:spcAft>
-                <a:spcPts val="810"/>
-              </a:spcAft>
-            </a:pPr>
-            <a:r>
-              <a:rPr sz="1800" b="1">
+                <a:spcPts val="1980"/>
+              </a:spcAft>
+            </a:pPr>
+            <a:r>
+              <a:rPr sz="4400" b="0">
                 <a:solidFill>
                   <a:srgbClr val="1F2A44"/>
                 </a:solidFill>
                 <a:latin typeface="Nunito Sans"/>
               </a:rPr>
-              <a:t>🦉 Aula de Filosofía</a:t>
+              <a:t>🙃</a:t>
             </a:r>
           </a:p>
         </p:txBody>

--- a/curso/pptx/S53.pptx
+++ b/curso/pptx/S53.pptx
@@ -472,426 +472,6 @@
     </a:lvl9pPr>
   </p:notesStyle>
 </p:notesMaster>
-</file>
-
-<file path=ppt/notesSlides/notesSlide1.xml><?xml version="1.0" encoding="utf-8"?>
-<p:notes xmlns:a="http://schemas.openxmlformats.org/drawingml/2006/main" xmlns:p="http://schemas.openxmlformats.org/presentationml/2006/main" xmlns:r="http://schemas.openxmlformats.org/officeDocument/2006/relationships">
-  <p:cSld>
-    <p:spTree>
-      <p:nvGrpSpPr>
-        <p:cNvPr id="1" name=""/>
-        <p:cNvGrpSpPr/>
-        <p:nvPr/>
-      </p:nvGrpSpPr>
-      <p:grpSpPr>
-        <a:xfrm>
-          <a:off x="0" y="0"/>
-          <a:ext cx="0" cy="0"/>
-          <a:chOff x="0" y="0"/>
-          <a:chExt cx="0" cy="0"/>
-        </a:xfrm>
-      </p:grpSpPr>
-      <p:sp>
-        <p:nvSpPr>
-          <p:cNvPr id="2" name="Slide Image Placeholder 1"/>
-          <p:cNvSpPr>
-            <a:spLocks noGrp="1"/>
-          </p:cNvSpPr>
-          <p:nvPr>
-            <p:ph type="sldImg" idx="2"/>
-          </p:nvPr>
-        </p:nvSpPr>
-        <p:spPr/>
-      </p:sp>
-      <p:sp>
-        <p:nvSpPr>
-          <p:cNvPr id="3" name="Notes Placeholder 2"/>
-          <p:cNvSpPr>
-            <a:spLocks noGrp="1"/>
-          </p:cNvSpPr>
-          <p:nvPr>
-            <p:ph type="body" idx="3" sz="quarter"/>
-          </p:nvPr>
-        </p:nvSpPr>
-        <p:spPr/>
-        <p:txBody>
-          <a:bodyPr/>
-          <a:lstStyle/>
-          <a:p>
-            <a:r>
-              <a:t>3 minutos. Sin apuntes. Es para recordar, no cuenta para nota.</a:t>
-            </a:r>
-          </a:p>
-        </p:txBody>
-      </p:sp>
-      <p:sp>
-        <p:nvSpPr>
-          <p:cNvPr id="4" name="Slide Number Placeholder 3"/>
-          <p:cNvSpPr>
-            <a:spLocks noGrp="1"/>
-          </p:cNvSpPr>
-          <p:nvPr>
-            <p:ph type="sldNum" idx="5" sz="quarter"/>
-          </p:nvPr>
-        </p:nvSpPr>
-        <p:spPr/>
-      </p:sp>
-    </p:spTree>
-  </p:cSld>
-  <p:clrMapOvr>
-    <a:masterClrMapping/>
-  </p:clrMapOvr>
-</p:notes>
-</file>
-
-<file path=ppt/notesSlides/notesSlide2.xml><?xml version="1.0" encoding="utf-8"?>
-<p:notes xmlns:a="http://schemas.openxmlformats.org/drawingml/2006/main" xmlns:p="http://schemas.openxmlformats.org/presentationml/2006/main" xmlns:r="http://schemas.openxmlformats.org/officeDocument/2006/relationships">
-  <p:cSld>
-    <p:spTree>
-      <p:nvGrpSpPr>
-        <p:cNvPr id="1" name=""/>
-        <p:cNvGrpSpPr/>
-        <p:nvPr/>
-      </p:nvGrpSpPr>
-      <p:grpSpPr>
-        <a:xfrm>
-          <a:off x="0" y="0"/>
-          <a:ext cx="0" cy="0"/>
-          <a:chOff x="0" y="0"/>
-          <a:chExt cx="0" cy="0"/>
-        </a:xfrm>
-      </p:grpSpPr>
-      <p:sp>
-        <p:nvSpPr>
-          <p:cNvPr id="2" name="Slide Image Placeholder 1"/>
-          <p:cNvSpPr>
-            <a:spLocks noGrp="1"/>
-          </p:cNvSpPr>
-          <p:nvPr>
-            <p:ph type="sldImg" idx="2"/>
-          </p:nvPr>
-        </p:nvSpPr>
-        <p:spPr/>
-      </p:sp>
-      <p:sp>
-        <p:nvSpPr>
-          <p:cNvPr id="3" name="Notes Placeholder 2"/>
-          <p:cNvSpPr>
-            <a:spLocks noGrp="1"/>
-          </p:cNvSpPr>
-          <p:nvPr>
-            <p:ph type="body" idx="3" sz="quarter"/>
-          </p:nvPr>
-        </p:nvSpPr>
-        <p:spPr/>
-        <p:txBody>
-          <a:bodyPr/>
-          <a:lstStyle/>
-          <a:p>
-            <a:r>
-              <a:t>3 minutos. Sin apuntes. Es para recordar, no cuenta para nota.</a:t>
-            </a:r>
-          </a:p>
-        </p:txBody>
-      </p:sp>
-      <p:sp>
-        <p:nvSpPr>
-          <p:cNvPr id="4" name="Slide Number Placeholder 3"/>
-          <p:cNvSpPr>
-            <a:spLocks noGrp="1"/>
-          </p:cNvSpPr>
-          <p:nvPr>
-            <p:ph type="sldNum" idx="5" sz="quarter"/>
-          </p:nvPr>
-        </p:nvSpPr>
-        <p:spPr/>
-      </p:sp>
-    </p:spTree>
-  </p:cSld>
-  <p:clrMapOvr>
-    <a:masterClrMapping/>
-  </p:clrMapOvr>
-</p:notes>
-</file>
-
-<file path=ppt/notesSlides/notesSlide3.xml><?xml version="1.0" encoding="utf-8"?>
-<p:notes xmlns:a="http://schemas.openxmlformats.org/drawingml/2006/main" xmlns:p="http://schemas.openxmlformats.org/presentationml/2006/main" xmlns:r="http://schemas.openxmlformats.org/officeDocument/2006/relationships">
-  <p:cSld>
-    <p:spTree>
-      <p:nvGrpSpPr>
-        <p:cNvPr id="1" name=""/>
-        <p:cNvGrpSpPr/>
-        <p:nvPr/>
-      </p:nvGrpSpPr>
-      <p:grpSpPr>
-        <a:xfrm>
-          <a:off x="0" y="0"/>
-          <a:ext cx="0" cy="0"/>
-          <a:chOff x="0" y="0"/>
-          <a:chExt cx="0" cy="0"/>
-        </a:xfrm>
-      </p:grpSpPr>
-      <p:sp>
-        <p:nvSpPr>
-          <p:cNvPr id="2" name="Slide Image Placeholder 1"/>
-          <p:cNvSpPr>
-            <a:spLocks noGrp="1"/>
-          </p:cNvSpPr>
-          <p:nvPr>
-            <p:ph type="sldImg" idx="2"/>
-          </p:nvPr>
-        </p:nvSpPr>
-        <p:spPr/>
-      </p:sp>
-      <p:sp>
-        <p:nvSpPr>
-          <p:cNvPr id="3" name="Notes Placeholder 2"/>
-          <p:cNvSpPr>
-            <a:spLocks noGrp="1"/>
-          </p:cNvSpPr>
-          <p:nvPr>
-            <p:ph type="body" idx="3" sz="quarter"/>
-          </p:nvPr>
-        </p:nvSpPr>
-        <p:spPr/>
-        <p:txBody>
-          <a:bodyPr/>
-          <a:lstStyle/>
-          <a:p>
-            <a:r>
-              <a:t>Nadie tiene que contestar: solo pensarlo.</a:t>
-            </a:r>
-          </a:p>
-        </p:txBody>
-      </p:sp>
-      <p:sp>
-        <p:nvSpPr>
-          <p:cNvPr id="4" name="Slide Number Placeholder 3"/>
-          <p:cNvSpPr>
-            <a:spLocks noGrp="1"/>
-          </p:cNvSpPr>
-          <p:nvPr>
-            <p:ph type="sldNum" idx="5" sz="quarter"/>
-          </p:nvPr>
-        </p:nvSpPr>
-        <p:spPr/>
-      </p:sp>
-    </p:spTree>
-  </p:cSld>
-  <p:clrMapOvr>
-    <a:masterClrMapping/>
-  </p:clrMapOvr>
-</p:notes>
-</file>
-
-<file path=ppt/notesSlides/notesSlide4.xml><?xml version="1.0" encoding="utf-8"?>
-<p:notes xmlns:a="http://schemas.openxmlformats.org/drawingml/2006/main" xmlns:p="http://schemas.openxmlformats.org/presentationml/2006/main" xmlns:r="http://schemas.openxmlformats.org/officeDocument/2006/relationships">
-  <p:cSld>
-    <p:spTree>
-      <p:nvGrpSpPr>
-        <p:cNvPr id="1" name=""/>
-        <p:cNvGrpSpPr/>
-        <p:nvPr/>
-      </p:nvGrpSpPr>
-      <p:grpSpPr>
-        <a:xfrm>
-          <a:off x="0" y="0"/>
-          <a:ext cx="0" cy="0"/>
-          <a:chOff x="0" y="0"/>
-          <a:chExt cx="0" cy="0"/>
-        </a:xfrm>
-      </p:grpSpPr>
-      <p:sp>
-        <p:nvSpPr>
-          <p:cNvPr id="2" name="Slide Image Placeholder 1"/>
-          <p:cNvSpPr>
-            <a:spLocks noGrp="1"/>
-          </p:cNvSpPr>
-          <p:nvPr>
-            <p:ph type="sldImg" idx="2"/>
-          </p:nvPr>
-        </p:nvSpPr>
-        <p:spPr/>
-      </p:sp>
-      <p:sp>
-        <p:nvSpPr>
-          <p:cNvPr id="3" name="Notes Placeholder 2"/>
-          <p:cNvSpPr>
-            <a:spLocks noGrp="1"/>
-          </p:cNvSpPr>
-          <p:nvPr>
-            <p:ph type="body" idx="3" sz="quarter"/>
-          </p:nvPr>
-        </p:nvSpPr>
-        <p:spPr/>
-        <p:txBody>
-          <a:bodyPr/>
-          <a:lstStyle/>
-          <a:p>
-            <a:r>
-              <a:t>Dejar unos segundos para que piensen la respuesta fácil antes de enseñar los pasos.</a:t>
-            </a:r>
-          </a:p>
-        </p:txBody>
-      </p:sp>
-      <p:sp>
-        <p:nvSpPr>
-          <p:cNvPr id="4" name="Slide Number Placeholder 3"/>
-          <p:cNvSpPr>
-            <a:spLocks noGrp="1"/>
-          </p:cNvSpPr>
-          <p:nvPr>
-            <p:ph type="sldNum" idx="5" sz="quarter"/>
-          </p:nvPr>
-        </p:nvSpPr>
-        <p:spPr/>
-      </p:sp>
-    </p:spTree>
-  </p:cSld>
-  <p:clrMapOvr>
-    <a:masterClrMapping/>
-  </p:clrMapOvr>
-</p:notes>
-</file>
-
-<file path=ppt/notesSlides/notesSlide5.xml><?xml version="1.0" encoding="utf-8"?>
-<p:notes xmlns:a="http://schemas.openxmlformats.org/drawingml/2006/main" xmlns:p="http://schemas.openxmlformats.org/presentationml/2006/main" xmlns:r="http://schemas.openxmlformats.org/officeDocument/2006/relationships">
-  <p:cSld>
-    <p:spTree>
-      <p:nvGrpSpPr>
-        <p:cNvPr id="1" name=""/>
-        <p:cNvGrpSpPr/>
-        <p:nvPr/>
-      </p:nvGrpSpPr>
-      <p:grpSpPr>
-        <a:xfrm>
-          <a:off x="0" y="0"/>
-          <a:ext cx="0" cy="0"/>
-          <a:chOff x="0" y="0"/>
-          <a:chExt cx="0" cy="0"/>
-        </a:xfrm>
-      </p:grpSpPr>
-      <p:sp>
-        <p:nvSpPr>
-          <p:cNvPr id="2" name="Slide Image Placeholder 1"/>
-          <p:cNvSpPr>
-            <a:spLocks noGrp="1"/>
-          </p:cNvSpPr>
-          <p:nvPr>
-            <p:ph type="sldImg" idx="2"/>
-          </p:nvPr>
-        </p:nvSpPr>
-        <p:spPr/>
-      </p:sp>
-      <p:sp>
-        <p:nvSpPr>
-          <p:cNvPr id="3" name="Notes Placeholder 2"/>
-          <p:cNvSpPr>
-            <a:spLocks noGrp="1"/>
-          </p:cNvSpPr>
-          <p:nvPr>
-            <p:ph type="body" idx="3" sz="quarter"/>
-          </p:nvPr>
-        </p:nvSpPr>
-        <p:spPr/>
-        <p:txBody>
-          <a:bodyPr/>
-          <a:lstStyle/>
-          <a:p>
-            <a:r>
-              <a:t>Dejar 2 minutos para que lo escriban. La diapositiva siguiente muestra el resumen.</a:t>
-            </a:r>
-          </a:p>
-        </p:txBody>
-      </p:sp>
-      <p:sp>
-        <p:nvSpPr>
-          <p:cNvPr id="4" name="Slide Number Placeholder 3"/>
-          <p:cNvSpPr>
-            <a:spLocks noGrp="1"/>
-          </p:cNvSpPr>
-          <p:nvPr>
-            <p:ph type="sldNum" idx="5" sz="quarter"/>
-          </p:nvPr>
-        </p:nvSpPr>
-        <p:spPr/>
-      </p:sp>
-    </p:spTree>
-  </p:cSld>
-  <p:clrMapOvr>
-    <a:masterClrMapping/>
-  </p:clrMapOvr>
-</p:notes>
-</file>
-
-<file path=ppt/notesSlides/notesSlide6.xml><?xml version="1.0" encoding="utf-8"?>
-<p:notes xmlns:a="http://schemas.openxmlformats.org/drawingml/2006/main" xmlns:p="http://schemas.openxmlformats.org/presentationml/2006/main" xmlns:r="http://schemas.openxmlformats.org/officeDocument/2006/relationships">
-  <p:cSld>
-    <p:spTree>
-      <p:nvGrpSpPr>
-        <p:cNvPr id="1" name=""/>
-        <p:cNvGrpSpPr/>
-        <p:nvPr/>
-      </p:nvGrpSpPr>
-      <p:grpSpPr>
-        <a:xfrm>
-          <a:off x="0" y="0"/>
-          <a:ext cx="0" cy="0"/>
-          <a:chOff x="0" y="0"/>
-          <a:chExt cx="0" cy="0"/>
-        </a:xfrm>
-      </p:grpSpPr>
-      <p:sp>
-        <p:nvSpPr>
-          <p:cNvPr id="2" name="Slide Image Placeholder 1"/>
-          <p:cNvSpPr>
-            <a:spLocks noGrp="1"/>
-          </p:cNvSpPr>
-          <p:nvPr>
-            <p:ph type="sldImg" idx="2"/>
-          </p:nvPr>
-        </p:nvSpPr>
-        <p:spPr/>
-      </p:sp>
-      <p:sp>
-        <p:nvSpPr>
-          <p:cNvPr id="3" name="Notes Placeholder 2"/>
-          <p:cNvSpPr>
-            <a:spLocks noGrp="1"/>
-          </p:cNvSpPr>
-          <p:nvPr>
-            <p:ph type="body" idx="3" sz="quarter"/>
-          </p:nvPr>
-        </p:nvSpPr>
-        <p:spPr/>
-        <p:txBody>
-          <a:bodyPr/>
-          <a:lstStyle/>
-          <a:p>
-            <a:r>
-              <a:t>Buscar: «burbuja de filtros Eli Pariser» · «cómo funciona el algoritmo de las redes sociales explicado»</a:t>
-            </a:r>
-          </a:p>
-        </p:txBody>
-      </p:sp>
-      <p:sp>
-        <p:nvSpPr>
-          <p:cNvPr id="4" name="Slide Number Placeholder 3"/>
-          <p:cNvSpPr>
-            <a:spLocks noGrp="1"/>
-          </p:cNvSpPr>
-          <p:nvPr>
-            <p:ph type="sldNum" idx="5" sz="quarter"/>
-          </p:nvPr>
-        </p:nvSpPr>
-        <p:spPr/>
-      </p:sp>
-    </p:spTree>
-  </p:cSld>
-  <p:clrMapOvr>
-    <a:masterClrMapping/>
-  </p:clrMapOvr>
-</p:notes>
 </file>
 
 <file path=ppt/slideLayouts/slideLayout1.xml><?xml version="1.0" encoding="utf-8"?>

--- a/curso/pptx/S53.pptx
+++ b/curso/pptx/S53.pptx
@@ -3718,7 +3718,7 @@
                 </a:solidFill>
                 <a:latin typeface="Fredoka"/>
               </a:rPr>
-              <a:t>Caso 1 · Iker y su hermana</a:t>
+              <a:t>Caso 1 · Un chico y su hermana</a:t>
             </a:r>
           </a:p>
         </p:txBody>
@@ -3800,7 +3800,7 @@
                 </a:solidFill>
                 <a:latin typeface="Nunito Sans"/>
               </a:rPr>
-              <a:t>Los dos buscan «Athletic» en YouTube. A Iker le salen goles. A su hermana, entrevistas y fútbol femenino.</a:t>
+              <a:t>Los dos buscan «Athletic» en YouTube. A él le salen goles. A su hermana, entrevistas y fútbol femenino.</a:t>
             </a:r>
           </a:p>
         </p:txBody>
@@ -3873,7 +3873,7 @@
                 </a:solidFill>
                 <a:latin typeface="Nunito Sans"/>
               </a:rPr>
-              <a:t>A Iker le enseña goles porque es lo que más mira.</a:t>
+              <a:t>A él le enseña goles porque es lo que más mira.</a:t>
             </a:r>
           </a:p>
           <a:p>
@@ -4109,7 +4109,7 @@
                 </a:solidFill>
                 <a:latin typeface="Nunito Sans"/>
               </a:rPr>
-              <a:t>Leire ve dos vídeos de gente discutiendo. Al día siguiente, le salen muchos más vídeos de discusiones.</a:t>
+              <a:t>Una chica ve dos vídeos de gente discutiendo. Al día siguiente, le salen muchos más vídeos de discusiones.</a:t>
             </a:r>
           </a:p>
         </p:txBody>
@@ -4207,7 +4207,7 @@
                 </a:solidFill>
                 <a:latin typeface="Nunito Sans"/>
               </a:rPr>
-              <a:t>Leire puede acabar creyendo que todo el mundo está enfadado.</a:t>
+              <a:t>Esa chica puede acabar creyendo que todo el mundo está enfadado.</a:t>
             </a:r>
           </a:p>
           <a:p>
@@ -4232,7 +4232,7 @@
                 </a:solidFill>
                 <a:latin typeface="Nunito Sans"/>
               </a:rPr>
-              <a:t>Conclusión: el algoritmo busca que siga mirando. Lo que ve Leire es una selección, no el mundo.</a:t>
+              <a:t>Conclusión: el algoritmo busca que siga mirando. Lo que ve esa chica es una selección, no el mundo.</a:t>
             </a:r>
           </a:p>
         </p:txBody>
@@ -4418,7 +4418,7 @@
                 </a:solidFill>
                 <a:latin typeface="Nunito Sans"/>
               </a:rPr>
-              <a:t>Dylan: «Estoy en una burbuja por culpa de TikTok». Pero solo sigue cuentas que piensan como él y bloquea a las demás.</a:t>
+              <a:t>Un chico: «Estoy en una burbuja por culpa de TikTok». Pero solo sigue cuentas que piensan como él y bloquea a las demás.</a:t>
             </a:r>
           </a:p>
         </p:txBody>
@@ -4774,7 +4774,7 @@
                 </a:solidFill>
                 <a:latin typeface="Fredoka"/>
               </a:rPr>
-              <a:t>Cuatro formas de salir</a:t>
+              <a:t>Lo que hacen algunas personas para decidir ellas (elige si te sirve alguno)</a:t>
             </a:r>
           </a:p>
         </p:txBody>
@@ -6457,7 +6457,7 @@
                 </a:solidFill>
                 <a:latin typeface="Nunito Sans"/>
               </a:rPr>
-              <a:t>Iker y su hermana buscan «Athletic» en YouTube a la vez. A Iker le salen goles. A ella, entrevistas y fútbol femenino. Mismas palabras.</a:t>
+              <a:t>Un chico y su hermana buscan «Athletic» en YouTube a la vez. A él le salen goles. A ella, entrevistas y fútbol femenino. Mismas palabras.</a:t>
             </a:r>
           </a:p>
         </p:txBody>

--- a/curso/pptx/S53.pptx
+++ b/curso/pptx/S53.pptx
@@ -6054,7 +6054,7 @@
                 </a:solidFill>
                 <a:latin typeface="Nunito Sans"/>
               </a:rPr>
-              <a:t>Una ______ es un caso suelto que alguien cuenta.  (sesión 41)</a:t>
+              <a:t>Que un dilema sea difícil no quiere decir que todo ______.  (sesión 41)</a:t>
             </a:r>
           </a:p>
         </p:txBody>
@@ -6292,7 +6292,7 @@
                 </a:solidFill>
                 <a:latin typeface="Nunito Sans"/>
               </a:rPr>
-              <a:t>Una </a:t>
+              <a:t>Que un dilema sea difícil no quiere decir que todo </a:t>
             </a:r>
             <a:r>
               <a:rPr sz="2600" b="1">
@@ -6301,7 +6301,7 @@
                 </a:solidFill>
                 <a:latin typeface="Nunito Sans"/>
               </a:rPr>
-              <a:t>anécdota</a:t>
+              <a:t>valga</a:t>
             </a:r>
             <a:r>
               <a:rPr sz="2600" b="0">
@@ -6310,7 +6310,7 @@
                 </a:solidFill>
                 <a:latin typeface="Nunito Sans"/>
               </a:rPr>
-              <a:t> es un caso suelto que alguien cuenta.  (sesión 41)</a:t>
+              <a:t>.  (sesión 41)</a:t>
             </a:r>
           </a:p>
         </p:txBody>
@@ -7168,7 +7168,7 @@
                 </a:solidFill>
                 <a:latin typeface="Nunito Sans"/>
               </a:rPr>
-              <a:t>Se junta con el sesgo de confirmación (sesión 44)</a:t>
+              <a:t>Se junta con el sesgo de confirmación (sesión 45)</a:t>
             </a:r>
           </a:p>
           <a:p>
